--- a/LGA_롯데신사업_발표_맑은고딕.pptx
+++ b/LGA_롯데신사업_발표_맑은고딕.pptx
@@ -4962,7 +4962,7 @@
         </p:nvSpPr>
         <p:spPr>
           <a:xfrm>
-            <a:off x="841248" y="1700784"/>
+            <a:off x="841248" y="1872996"/>
             <a:ext cx="4905756" cy="306832"/>
           </a:xfrm>
           <a:prstGeom prst="rect">
@@ -5004,7 +5004,7 @@
         </p:nvSpPr>
         <p:spPr>
           <a:xfrm>
-            <a:off x="841248" y="2117344"/>
+            <a:off x="841248" y="2289556"/>
             <a:ext cx="4905756" cy="967232"/>
           </a:xfrm>
           <a:prstGeom prst="rect">
@@ -5132,7 +5132,7 @@
         </p:nvSpPr>
         <p:spPr>
           <a:xfrm>
-            <a:off x="6441948" y="1700784"/>
+            <a:off x="6441948" y="1872996"/>
             <a:ext cx="4905756" cy="306832"/>
           </a:xfrm>
           <a:prstGeom prst="rect">
@@ -5174,7 +5174,7 @@
         </p:nvSpPr>
         <p:spPr>
           <a:xfrm>
-            <a:off x="6441948" y="2117344"/>
+            <a:off x="6441948" y="2289556"/>
             <a:ext cx="4905756" cy="967232"/>
           </a:xfrm>
           <a:prstGeom prst="rect">
@@ -5302,7 +5302,7 @@
         </p:nvSpPr>
         <p:spPr>
           <a:xfrm>
-            <a:off x="841248" y="4014216"/>
+            <a:off x="841248" y="4186428"/>
             <a:ext cx="4905756" cy="306832"/>
           </a:xfrm>
           <a:prstGeom prst="rect">
@@ -5344,7 +5344,7 @@
         </p:nvSpPr>
         <p:spPr>
           <a:xfrm>
-            <a:off x="841248" y="4430776"/>
+            <a:off x="841248" y="4602988"/>
             <a:ext cx="4905756" cy="967232"/>
           </a:xfrm>
           <a:prstGeom prst="rect">
@@ -5472,7 +5472,7 @@
         </p:nvSpPr>
         <p:spPr>
           <a:xfrm>
-            <a:off x="6441948" y="4014216"/>
+            <a:off x="6441948" y="4186428"/>
             <a:ext cx="4905756" cy="306832"/>
           </a:xfrm>
           <a:prstGeom prst="rect">
@@ -5514,7 +5514,7 @@
         </p:nvSpPr>
         <p:spPr>
           <a:xfrm>
-            <a:off x="6441948" y="4430776"/>
+            <a:off x="6441948" y="4602988"/>
             <a:ext cx="4905756" cy="967232"/>
           </a:xfrm>
           <a:prstGeom prst="rect">
@@ -5899,7 +5899,7 @@
         </p:nvSpPr>
         <p:spPr>
           <a:xfrm>
-            <a:off x="841248" y="1700784"/>
+            <a:off x="841248" y="1859720"/>
             <a:ext cx="3038856" cy="306832"/>
           </a:xfrm>
           <a:prstGeom prst="rect">
@@ -5941,7 +5941,7 @@
         </p:nvSpPr>
         <p:spPr>
           <a:xfrm>
-            <a:off x="841248" y="2117344"/>
+            <a:off x="841248" y="2276280"/>
             <a:ext cx="3038856" cy="217932"/>
           </a:xfrm>
           <a:prstGeom prst="rect">
@@ -5983,7 +5983,7 @@
         </p:nvSpPr>
         <p:spPr>
           <a:xfrm>
-            <a:off x="841248" y="2426716"/>
+            <a:off x="841248" y="2585652"/>
             <a:ext cx="3038856" cy="764032"/>
           </a:xfrm>
           <a:prstGeom prst="rect">
@@ -6087,7 +6087,7 @@
         </p:nvSpPr>
         <p:spPr>
           <a:xfrm>
-            <a:off x="4575048" y="1700784"/>
+            <a:off x="4575048" y="1859720"/>
             <a:ext cx="3038856" cy="306832"/>
           </a:xfrm>
           <a:prstGeom prst="rect">
@@ -6129,7 +6129,7 @@
         </p:nvSpPr>
         <p:spPr>
           <a:xfrm>
-            <a:off x="4575048" y="2117344"/>
+            <a:off x="4575048" y="2276280"/>
             <a:ext cx="3038856" cy="217932"/>
           </a:xfrm>
           <a:prstGeom prst="rect">
@@ -6171,7 +6171,7 @@
         </p:nvSpPr>
         <p:spPr>
           <a:xfrm>
-            <a:off x="4575048" y="2426716"/>
+            <a:off x="4575048" y="2585652"/>
             <a:ext cx="3038856" cy="764032"/>
           </a:xfrm>
           <a:prstGeom prst="rect">
@@ -6275,7 +6275,7 @@
         </p:nvSpPr>
         <p:spPr>
           <a:xfrm>
-            <a:off x="8308848" y="1700784"/>
+            <a:off x="8308848" y="1859720"/>
             <a:ext cx="3038856" cy="306832"/>
           </a:xfrm>
           <a:prstGeom prst="rect">
@@ -6317,7 +6317,7 @@
         </p:nvSpPr>
         <p:spPr>
           <a:xfrm>
-            <a:off x="8308848" y="2117344"/>
+            <a:off x="8308848" y="2276280"/>
             <a:ext cx="3038856" cy="217932"/>
           </a:xfrm>
           <a:prstGeom prst="rect">
@@ -6359,7 +6359,7 @@
         </p:nvSpPr>
         <p:spPr>
           <a:xfrm>
-            <a:off x="8308848" y="2426716"/>
+            <a:off x="8308848" y="2585652"/>
             <a:ext cx="3038856" cy="764032"/>
           </a:xfrm>
           <a:prstGeom prst="rect">
@@ -6498,7 +6498,7 @@
         </p:nvSpPr>
         <p:spPr>
           <a:xfrm>
-            <a:off x="841248" y="4413876"/>
+            <a:off x="841248" y="4553390"/>
             <a:ext cx="3038856" cy="205232"/>
           </a:xfrm>
           <a:prstGeom prst="rect">
@@ -6540,7 +6540,7 @@
         </p:nvSpPr>
         <p:spPr>
           <a:xfrm>
-            <a:off x="841248" y="4728836"/>
+            <a:off x="841248" y="4868350"/>
             <a:ext cx="3038856" cy="408432"/>
           </a:xfrm>
           <a:prstGeom prst="rect">
@@ -6651,7 +6651,7 @@
         </p:nvSpPr>
         <p:spPr>
           <a:xfrm>
-            <a:off x="4575048" y="4413876"/>
+            <a:off x="4575048" y="4553390"/>
             <a:ext cx="3038856" cy="205232"/>
           </a:xfrm>
           <a:prstGeom prst="rect">
@@ -6693,7 +6693,7 @@
         </p:nvSpPr>
         <p:spPr>
           <a:xfrm>
-            <a:off x="4575048" y="4728836"/>
+            <a:off x="4575048" y="4868350"/>
             <a:ext cx="3038856" cy="598932"/>
           </a:xfrm>
           <a:prstGeom prst="rect">
@@ -6804,7 +6804,7 @@
         </p:nvSpPr>
         <p:spPr>
           <a:xfrm>
-            <a:off x="8308848" y="4413876"/>
+            <a:off x="8308848" y="4553390"/>
             <a:ext cx="3038856" cy="205232"/>
           </a:xfrm>
           <a:prstGeom prst="rect">
@@ -6846,7 +6846,7 @@
         </p:nvSpPr>
         <p:spPr>
           <a:xfrm>
-            <a:off x="8308848" y="4728836"/>
+            <a:off x="8308848" y="4868350"/>
             <a:ext cx="3038856" cy="408432"/>
           </a:xfrm>
           <a:prstGeom prst="rect">
@@ -7188,11 +7188,11 @@
         <p:spPr>
           <a:xfrm>
             <a:off x="566928" y="1792224"/>
-            <a:ext cx="3587496" cy="2001123"/>
+            <a:ext cx="3587496" cy="1928470"/>
           </a:xfrm>
           <a:prstGeom prst="roundRect">
             <a:avLst>
-              <a:gd name="adj" fmla="val 2742"/>
+              <a:gd name="adj" fmla="val 2845"/>
             </a:avLst>
           </a:prstGeom>
           <a:solidFill>
@@ -7221,7 +7221,7 @@
         </p:nvSpPr>
         <p:spPr>
           <a:xfrm>
-            <a:off x="841248" y="2011680"/>
+            <a:off x="841248" y="2261667"/>
             <a:ext cx="3038856" cy="306832"/>
           </a:xfrm>
           <a:prstGeom prst="rect">
@@ -7263,7 +7263,7 @@
         </p:nvSpPr>
         <p:spPr>
           <a:xfrm>
-            <a:off x="841248" y="2428240"/>
+            <a:off x="841248" y="2678227"/>
             <a:ext cx="3038856" cy="217932"/>
           </a:xfrm>
           <a:prstGeom prst="rect">
@@ -7305,7 +7305,7 @@
         </p:nvSpPr>
         <p:spPr>
           <a:xfrm>
-            <a:off x="841248" y="3383391"/>
+            <a:off x="841248" y="3310738"/>
             <a:ext cx="3038856" cy="217932"/>
           </a:xfrm>
           <a:prstGeom prst="rect">
@@ -7348,11 +7348,11 @@
         <p:spPr>
           <a:xfrm>
             <a:off x="4300728" y="1792224"/>
-            <a:ext cx="3587496" cy="2001123"/>
+            <a:ext cx="3587496" cy="1928470"/>
           </a:xfrm>
           <a:prstGeom prst="roundRect">
             <a:avLst>
-              <a:gd name="adj" fmla="val 2742"/>
+              <a:gd name="adj" fmla="val 2845"/>
             </a:avLst>
           </a:prstGeom>
           <a:solidFill>
@@ -7381,7 +7381,7 @@
         </p:nvSpPr>
         <p:spPr>
           <a:xfrm>
-            <a:off x="4575048" y="2011680"/>
+            <a:off x="4575048" y="2261667"/>
             <a:ext cx="3038856" cy="306832"/>
           </a:xfrm>
           <a:prstGeom prst="rect">
@@ -7423,7 +7423,7 @@
         </p:nvSpPr>
         <p:spPr>
           <a:xfrm>
-            <a:off x="4575048" y="2428240"/>
+            <a:off x="4575048" y="2678227"/>
             <a:ext cx="3038856" cy="217932"/>
           </a:xfrm>
           <a:prstGeom prst="rect">
@@ -7465,7 +7465,7 @@
         </p:nvSpPr>
         <p:spPr>
           <a:xfrm>
-            <a:off x="4575048" y="3383391"/>
+            <a:off x="4575048" y="3310738"/>
             <a:ext cx="3038856" cy="217932"/>
           </a:xfrm>
           <a:prstGeom prst="rect">
@@ -7508,11 +7508,11 @@
         <p:spPr>
           <a:xfrm>
             <a:off x="8034528" y="1792224"/>
-            <a:ext cx="3587496" cy="2001123"/>
+            <a:ext cx="3587496" cy="1928470"/>
           </a:xfrm>
           <a:prstGeom prst="roundRect">
             <a:avLst>
-              <a:gd name="adj" fmla="val 2742"/>
+              <a:gd name="adj" fmla="val 2845"/>
             </a:avLst>
           </a:prstGeom>
           <a:solidFill>
@@ -7541,7 +7541,7 @@
         </p:nvSpPr>
         <p:spPr>
           <a:xfrm>
-            <a:off x="8308848" y="2011680"/>
+            <a:off x="8308848" y="2261667"/>
             <a:ext cx="3038856" cy="306832"/>
           </a:xfrm>
           <a:prstGeom prst="rect">
@@ -7583,7 +7583,7 @@
         </p:nvSpPr>
         <p:spPr>
           <a:xfrm>
-            <a:off x="8308848" y="2428240"/>
+            <a:off x="8308848" y="2678227"/>
             <a:ext cx="3038856" cy="217932"/>
           </a:xfrm>
           <a:prstGeom prst="rect">
@@ -7625,7 +7625,7 @@
         </p:nvSpPr>
         <p:spPr>
           <a:xfrm>
-            <a:off x="8308848" y="3383391"/>
+            <a:off x="8308848" y="3310738"/>
             <a:ext cx="3038856" cy="217932"/>
           </a:xfrm>
           <a:prstGeom prst="rect">
@@ -7667,7 +7667,7 @@
         </p:nvSpPr>
         <p:spPr>
           <a:xfrm>
-            <a:off x="4154424" y="2536754"/>
+            <a:off x="4154424" y="2500427"/>
             <a:ext cx="146304" cy="512064"/>
           </a:xfrm>
           <a:prstGeom prst="rect">
@@ -7709,7 +7709,7 @@
         </p:nvSpPr>
         <p:spPr>
           <a:xfrm>
-            <a:off x="7888224" y="2536754"/>
+            <a:off x="7888224" y="2500427"/>
             <a:ext cx="146304" cy="512064"/>
           </a:xfrm>
           <a:prstGeom prst="rect">
@@ -7751,7 +7751,7 @@
         </p:nvSpPr>
         <p:spPr>
           <a:xfrm>
-            <a:off x="566928" y="3976227"/>
+            <a:off x="566928" y="3903574"/>
             <a:ext cx="4572000" cy="268732"/>
           </a:xfrm>
           <a:prstGeom prst="rect">
@@ -7793,12 +7793,12 @@
         </p:nvSpPr>
         <p:spPr>
           <a:xfrm>
-            <a:off x="566928" y="4305411"/>
-            <a:ext cx="3587496" cy="1638189"/>
+            <a:off x="566928" y="4232758"/>
+            <a:ext cx="3587496" cy="1578712"/>
           </a:xfrm>
           <a:prstGeom prst="roundRect">
             <a:avLst>
-              <a:gd name="adj" fmla="val 3349"/>
+              <a:gd name="adj" fmla="val 3475"/>
             </a:avLst>
           </a:prstGeom>
           <a:solidFill>
@@ -7827,7 +7827,7 @@
         </p:nvSpPr>
         <p:spPr>
           <a:xfrm>
-            <a:off x="841248" y="4524867"/>
+            <a:off x="841248" y="4656861"/>
             <a:ext cx="3038856" cy="230632"/>
           </a:xfrm>
           <a:prstGeom prst="rect">
@@ -7869,7 +7869,7 @@
         </p:nvSpPr>
         <p:spPr>
           <a:xfrm>
-            <a:off x="841248" y="4865227"/>
+            <a:off x="841248" y="4997221"/>
             <a:ext cx="3038856" cy="408432"/>
           </a:xfrm>
           <a:prstGeom prst="rect">
@@ -7911,12 +7911,12 @@
         </p:nvSpPr>
         <p:spPr>
           <a:xfrm>
-            <a:off x="4300728" y="4305411"/>
-            <a:ext cx="3587496" cy="1638189"/>
+            <a:off x="4300728" y="4232758"/>
+            <a:ext cx="3587496" cy="1578712"/>
           </a:xfrm>
           <a:prstGeom prst="roundRect">
             <a:avLst>
-              <a:gd name="adj" fmla="val 3349"/>
+              <a:gd name="adj" fmla="val 3475"/>
             </a:avLst>
           </a:prstGeom>
           <a:solidFill>
@@ -7945,7 +7945,7 @@
         </p:nvSpPr>
         <p:spPr>
           <a:xfrm>
-            <a:off x="4575048" y="4524867"/>
+            <a:off x="4575048" y="4656861"/>
             <a:ext cx="3038856" cy="230632"/>
           </a:xfrm>
           <a:prstGeom prst="rect">
@@ -7987,7 +7987,7 @@
         </p:nvSpPr>
         <p:spPr>
           <a:xfrm>
-            <a:off x="4575048" y="4865227"/>
+            <a:off x="4575048" y="4997221"/>
             <a:ext cx="3038856" cy="217932"/>
           </a:xfrm>
           <a:prstGeom prst="rect">
@@ -8029,12 +8029,12 @@
         </p:nvSpPr>
         <p:spPr>
           <a:xfrm>
-            <a:off x="8034528" y="4305411"/>
-            <a:ext cx="3587496" cy="1638189"/>
+            <a:off x="8034528" y="4232758"/>
+            <a:ext cx="3587496" cy="1578712"/>
           </a:xfrm>
           <a:prstGeom prst="roundRect">
             <a:avLst>
-              <a:gd name="adj" fmla="val 3349"/>
+              <a:gd name="adj" fmla="val 3475"/>
             </a:avLst>
           </a:prstGeom>
           <a:solidFill>
@@ -8063,7 +8063,7 @@
         </p:nvSpPr>
         <p:spPr>
           <a:xfrm>
-            <a:off x="8308848" y="4524867"/>
+            <a:off x="8308848" y="4656861"/>
             <a:ext cx="3038856" cy="230632"/>
           </a:xfrm>
           <a:prstGeom prst="rect">
@@ -8105,7 +8105,7 @@
         </p:nvSpPr>
         <p:spPr>
           <a:xfrm>
-            <a:off x="8308848" y="4865227"/>
+            <a:off x="8308848" y="4997221"/>
             <a:ext cx="3038856" cy="217932"/>
           </a:xfrm>
           <a:prstGeom prst="rect">
@@ -13110,11 +13110,11 @@
         <p:spPr>
           <a:xfrm>
             <a:off x="566928" y="1481328"/>
-            <a:ext cx="3587496" cy="1801368"/>
+            <a:ext cx="3587496" cy="1613581"/>
           </a:xfrm>
           <a:prstGeom prst="roundRect">
             <a:avLst>
-              <a:gd name="adj" fmla="val 3046"/>
+              <a:gd name="adj" fmla="val 3400"/>
             </a:avLst>
           </a:prstGeom>
           <a:solidFill>
@@ -13143,7 +13143,7 @@
         </p:nvSpPr>
         <p:spPr>
           <a:xfrm>
-            <a:off x="841248" y="1700784"/>
+            <a:off x="841248" y="1714841"/>
             <a:ext cx="3038856" cy="243332"/>
           </a:xfrm>
           <a:prstGeom prst="rect">
@@ -13185,7 +13185,7 @@
         </p:nvSpPr>
         <p:spPr>
           <a:xfrm>
-            <a:off x="841248" y="2017268"/>
+            <a:off x="841248" y="2031325"/>
             <a:ext cx="3038856" cy="306832"/>
           </a:xfrm>
           <a:prstGeom prst="rect">
@@ -13227,8 +13227,8 @@
         </p:nvSpPr>
         <p:spPr>
           <a:xfrm>
-            <a:off x="841248" y="2433828"/>
-            <a:ext cx="3038856" cy="675132"/>
+            <a:off x="841248" y="2447885"/>
+            <a:ext cx="3038856" cy="459232"/>
           </a:xfrm>
           <a:prstGeom prst="rect">
             <a:avLst/>
@@ -13255,7 +13255,7 @@
                 <a:ea typeface="맑은 고딕" pitchFamily="34" charset="-122"/>
                 <a:cs typeface="맑은 고딕" pitchFamily="34" charset="-120"/>
               </a:rPr>
-              <a:t>고객의 '평생 가치'는 지금까지 결제한 순간에만 기록됐습니다. L.GA는 사지 않은 순간까지 가치로 바꿉니다.</a:t>
+              <a:t>고객의 '평생 가치'가 결제 순간에만 기록돼 왔습니다. 사지 않은 순간까지 넓힙니다.</a:t>
             </a:r>
             <a:endParaRPr lang="en-US" sz="1150" dirty="0"/>
           </a:p>
@@ -13270,11 +13270,11 @@
         <p:spPr>
           <a:xfrm>
             <a:off x="4300728" y="1481328"/>
-            <a:ext cx="3587496" cy="1801368"/>
+            <a:ext cx="3587496" cy="1613581"/>
           </a:xfrm>
           <a:prstGeom prst="roundRect">
             <a:avLst>
-              <a:gd name="adj" fmla="val 3046"/>
+              <a:gd name="adj" fmla="val 3400"/>
             </a:avLst>
           </a:prstGeom>
           <a:solidFill>
@@ -13303,7 +13303,7 @@
         </p:nvSpPr>
         <p:spPr>
           <a:xfrm>
-            <a:off x="4575048" y="1700784"/>
+            <a:off x="4575048" y="1714841"/>
             <a:ext cx="3038856" cy="243332"/>
           </a:xfrm>
           <a:prstGeom prst="rect">
@@ -13345,7 +13345,7 @@
         </p:nvSpPr>
         <p:spPr>
           <a:xfrm>
-            <a:off x="4575048" y="2017268"/>
+            <a:off x="4575048" y="2031325"/>
             <a:ext cx="3038856" cy="306832"/>
           </a:xfrm>
           <a:prstGeom prst="rect">
@@ -13387,8 +13387,8 @@
         </p:nvSpPr>
         <p:spPr>
           <a:xfrm>
-            <a:off x="4575048" y="2433828"/>
-            <a:ext cx="3038856" cy="675132"/>
+            <a:off x="4575048" y="2447885"/>
+            <a:ext cx="3038856" cy="459232"/>
           </a:xfrm>
           <a:prstGeom prst="rect">
             <a:avLst/>
@@ -13415,7 +13415,7 @@
                 <a:ea typeface="맑은 고딕" pitchFamily="34" charset="-122"/>
                 <a:cs typeface="맑은 고딕" pitchFamily="34" charset="-120"/>
               </a:rPr>
-              <a:t>새 인프라를 사는 사업이 아닙니다. 이미 깔려 있는 CCTV 위에 AI를 얹는 기존 자산의 AI 내재화 사례입니다.</a:t>
+              <a:t>새 인프라를 사는 사업이 아닙니다. 이미 깔린 CCTV 위에 AI를 얹습니다.</a:t>
             </a:r>
             <a:endParaRPr lang="en-US" sz="1150" dirty="0"/>
           </a:p>
@@ -13430,11 +13430,11 @@
         <p:spPr>
           <a:xfrm>
             <a:off x="8034528" y="1481328"/>
-            <a:ext cx="3587496" cy="1801368"/>
+            <a:ext cx="3587496" cy="1613581"/>
           </a:xfrm>
           <a:prstGeom prst="roundRect">
             <a:avLst>
-              <a:gd name="adj" fmla="val 3046"/>
+              <a:gd name="adj" fmla="val 3400"/>
             </a:avLst>
           </a:prstGeom>
           <a:solidFill>
@@ -13463,7 +13463,7 @@
         </p:nvSpPr>
         <p:spPr>
           <a:xfrm>
-            <a:off x="8308848" y="1700784"/>
+            <a:off x="8308848" y="1714841"/>
             <a:ext cx="3038856" cy="243332"/>
           </a:xfrm>
           <a:prstGeom prst="rect">
@@ -13505,7 +13505,7 @@
         </p:nvSpPr>
         <p:spPr>
           <a:xfrm>
-            <a:off x="8308848" y="2017268"/>
+            <a:off x="8308848" y="2031325"/>
             <a:ext cx="3038856" cy="306832"/>
           </a:xfrm>
           <a:prstGeom prst="rect">
@@ -13547,8 +13547,8 @@
         </p:nvSpPr>
         <p:spPr>
           <a:xfrm>
-            <a:off x="8308848" y="2433828"/>
-            <a:ext cx="3038856" cy="675132"/>
+            <a:off x="8308848" y="2447885"/>
+            <a:ext cx="3038856" cy="459232"/>
           </a:xfrm>
           <a:prstGeom prst="rect">
             <a:avLst/>
@@ -13575,7 +13575,7 @@
                 <a:ea typeface="맑은 고딕" pitchFamily="34" charset="-122"/>
                 <a:cs typeface="맑은 고딕" pitchFamily="34" charset="-120"/>
               </a:rPr>
-              <a:t>상품을 파는 유통에서 데이터를 파는 플랫폼으로. 롯데 리테일 자산의 플랫폼화 그 자체입니다.</a:t>
+              <a:t>상품을 파는 유통에서 데이터를 파는 플랫폼으로. 롯데 리테일 자산의 플랫폼화입니다.</a:t>
             </a:r>
             <a:endParaRPr lang="en-US" sz="1150" dirty="0"/>
           </a:p>
@@ -13589,7 +13589,7 @@
         </p:nvSpPr>
         <p:spPr>
           <a:xfrm>
-            <a:off x="566928" y="3465576"/>
+            <a:off x="566928" y="3277789"/>
             <a:ext cx="5486400" cy="268732"/>
           </a:xfrm>
           <a:prstGeom prst="rect">
@@ -13631,7 +13631,7 @@
         </p:nvSpPr>
         <p:spPr>
           <a:xfrm>
-            <a:off x="6217920" y="3465576"/>
+            <a:off x="6217920" y="3277789"/>
             <a:ext cx="5404104" cy="243332"/>
           </a:xfrm>
           <a:prstGeom prst="rect">
@@ -13673,12 +13673,12 @@
         </p:nvSpPr>
         <p:spPr>
           <a:xfrm>
-            <a:off x="566928" y="3794760"/>
-            <a:ext cx="2654046" cy="1629156"/>
+            <a:off x="566928" y="3606973"/>
+            <a:ext cx="2654046" cy="1477091"/>
           </a:xfrm>
           <a:prstGeom prst="roundRect">
             <a:avLst>
-              <a:gd name="adj" fmla="val 3368"/>
+              <a:gd name="adj" fmla="val 3714"/>
             </a:avLst>
           </a:prstGeom>
           <a:solidFill>
@@ -13700,8 +13700,8 @@
         </p:nvSpPr>
         <p:spPr>
           <a:xfrm>
-            <a:off x="841248" y="4014216"/>
-            <a:ext cx="2105406" cy="408432"/>
+            <a:off x="841248" y="3839297"/>
+            <a:ext cx="2105406" cy="230632"/>
           </a:xfrm>
           <a:prstGeom prst="rect">
             <a:avLst/>
@@ -13715,73 +13715,53 @@
           <a:p>
             <a:pPr algn="l" indent="0" marL="0">
               <a:lnSpc>
+                <a:spcPts val="1600"/>
+              </a:lnSpc>
+              <a:buNone/>
+            </a:pPr>
+            <a:r>
+              <a:rPr lang="en-US" sz="1350" b="1" dirty="0">
+                <a:solidFill>
+                  <a:srgbClr val="0E1420"/>
+                </a:solidFill>
+                <a:latin typeface="맑은 고딕" pitchFamily="34" charset="0"/>
+                <a:ea typeface="맑은 고딕" pitchFamily="34" charset="-122"/>
+                <a:cs typeface="맑은 고딕" pitchFamily="34" charset="-120"/>
+              </a:rPr>
+              <a:t>고객 기대 그 이상</a:t>
+            </a:r>
+            <a:endParaRPr lang="en-US" sz="1350" dirty="0"/>
+          </a:p>
+        </p:txBody>
+      </p:sp>
+      <p:sp>
+        <p:nvSpPr>
+          <p:cNvPr id="23" name="Text 20"/>
+          <p:cNvSpPr txBox="1"/>
+          <p:nvPr/>
+        </p:nvSpPr>
+        <p:spPr>
+          <a:xfrm>
+            <a:off x="841248" y="4179657"/>
+            <a:ext cx="2105406" cy="217932"/>
+          </a:xfrm>
+          <a:prstGeom prst="rect">
+            <a:avLst/>
+          </a:prstGeom>
+          <a:noFill/>
+          <a:ln/>
+        </p:spPr>
+        <p:txBody>
+          <a:bodyPr wrap="square" lIns="0" tIns="0" rIns="0" bIns="0" rtlCol="0" anchor="t"/>
+          <a:lstStyle/>
+          <a:p>
+            <a:pPr algn="l" indent="0" marL="0">
+              <a:lnSpc>
                 <a:spcPts val="1500"/>
               </a:lnSpc>
               <a:buNone/>
             </a:pPr>
             <a:r>
-              <a:rPr lang="en-US" sz="1250" b="1" dirty="0">
-                <a:solidFill>
-                  <a:srgbClr val="0E1420"/>
-                </a:solidFill>
-                <a:latin typeface="맑은 고딕" pitchFamily="34" charset="0"/>
-                <a:ea typeface="맑은 고딕" pitchFamily="34" charset="-122"/>
-                <a:cs typeface="맑은 고딕" pitchFamily="34" charset="-120"/>
-              </a:rPr>
-              <a:t>Beyond Customer</a:t>
-            </a:r>
-            <a:endParaRPr lang="en-US" sz="1250" dirty="0"/>
-          </a:p>
-          <a:p>
-            <a:pPr algn="l" indent="0" marL="0">
-              <a:lnSpc>
-                <a:spcPts val="1500"/>
-              </a:lnSpc>
-              <a:buNone/>
-            </a:pPr>
-            <a:r>
-              <a:rPr lang="en-US" sz="1250" b="1" dirty="0">
-                <a:solidFill>
-                  <a:srgbClr val="0E1420"/>
-                </a:solidFill>
-                <a:latin typeface="맑은 고딕" pitchFamily="34" charset="0"/>
-                <a:ea typeface="맑은 고딕" pitchFamily="34" charset="-122"/>
-                <a:cs typeface="맑은 고딕" pitchFamily="34" charset="-120"/>
-              </a:rPr>
-              <a:t>Expectation</a:t>
-            </a:r>
-            <a:endParaRPr lang="en-US" sz="1250" dirty="0"/>
-          </a:p>
-        </p:txBody>
-      </p:sp>
-      <p:sp>
-        <p:nvSpPr>
-          <p:cNvPr id="23" name="Text 20"/>
-          <p:cNvSpPr txBox="1"/>
-          <p:nvPr/>
-        </p:nvSpPr>
-        <p:spPr>
-          <a:xfrm>
-            <a:off x="841248" y="4532376"/>
-            <a:ext cx="2105406" cy="217932"/>
-          </a:xfrm>
-          <a:prstGeom prst="rect">
-            <a:avLst/>
-          </a:prstGeom>
-          <a:noFill/>
-          <a:ln/>
-        </p:spPr>
-        <p:txBody>
-          <a:bodyPr wrap="square" lIns="0" tIns="0" rIns="0" bIns="0" rtlCol="0" anchor="t"/>
-          <a:lstStyle/>
-          <a:p>
-            <a:pPr algn="l" indent="0" marL="0">
-              <a:lnSpc>
-                <a:spcPts val="1500"/>
-              </a:lnSpc>
-              <a:buNone/>
-            </a:pPr>
-            <a:r>
               <a:rPr lang="en-US" sz="1000" dirty="0">
                 <a:solidFill>
                   <a:srgbClr val="5E6979"/>
@@ -13790,7 +13770,7 @@
                 <a:ea typeface="맑은 고딕" pitchFamily="34" charset="-122"/>
                 <a:cs typeface="맑은 고딕" pitchFamily="34" charset="-120"/>
               </a:rPr>
-              <a:t>고객 기대 그 이상</a:t>
+              <a:t>Beyond Customer Expectation</a:t>
             </a:r>
             <a:endParaRPr lang="en-US" sz="1000" dirty="0"/>
           </a:p>
@@ -13804,7 +13784,7 @@
         </p:nvSpPr>
         <p:spPr>
           <a:xfrm>
-            <a:off x="841248" y="4841748"/>
+            <a:off x="841248" y="4489029"/>
             <a:ext cx="2105406" cy="408432"/>
           </a:xfrm>
           <a:prstGeom prst="rect">
@@ -13846,12 +13826,12 @@
         </p:nvSpPr>
         <p:spPr>
           <a:xfrm>
-            <a:off x="3367278" y="3794760"/>
-            <a:ext cx="2654046" cy="1629156"/>
+            <a:off x="3367278" y="3606973"/>
+            <a:ext cx="2654046" cy="1477091"/>
           </a:xfrm>
           <a:prstGeom prst="roundRect">
             <a:avLst>
-              <a:gd name="adj" fmla="val 3368"/>
+              <a:gd name="adj" fmla="val 3714"/>
             </a:avLst>
           </a:prstGeom>
           <a:solidFill>
@@ -13873,7 +13853,49 @@
         </p:nvSpPr>
         <p:spPr>
           <a:xfrm>
-            <a:off x="3641598" y="4014216"/>
+            <a:off x="3641598" y="3839297"/>
+            <a:ext cx="2105406" cy="230632"/>
+          </a:xfrm>
+          <a:prstGeom prst="rect">
+            <a:avLst/>
+          </a:prstGeom>
+          <a:noFill/>
+          <a:ln/>
+        </p:spPr>
+        <p:txBody>
+          <a:bodyPr wrap="square" lIns="0" tIns="0" rIns="0" bIns="0" rtlCol="0" anchor="t"/>
+          <a:lstStyle/>
+          <a:p>
+            <a:pPr algn="l" indent="0" marL="0">
+              <a:lnSpc>
+                <a:spcPts val="1600"/>
+              </a:lnSpc>
+              <a:buNone/>
+            </a:pPr>
+            <a:r>
+              <a:rPr lang="en-US" sz="1350" b="1" dirty="0">
+                <a:solidFill>
+                  <a:srgbClr val="0E1420"/>
+                </a:solidFill>
+                <a:latin typeface="맑은 고딕" pitchFamily="34" charset="0"/>
+                <a:ea typeface="맑은 고딕" pitchFamily="34" charset="-122"/>
+                <a:cs typeface="맑은 고딕" pitchFamily="34" charset="-120"/>
+              </a:rPr>
+              <a:t>도전</a:t>
+            </a:r>
+            <a:endParaRPr lang="en-US" sz="1350" dirty="0"/>
+          </a:p>
+        </p:txBody>
+      </p:sp>
+      <p:sp>
+        <p:nvSpPr>
+          <p:cNvPr id="27" name="Text 24"/>
+          <p:cNvSpPr txBox="1"/>
+          <p:nvPr/>
+        </p:nvSpPr>
+        <p:spPr>
+          <a:xfrm>
+            <a:off x="3641598" y="4179657"/>
             <a:ext cx="2105406" cy="217932"/>
           </a:xfrm>
           <a:prstGeom prst="rect">
@@ -13893,9 +13915,9 @@
               <a:buNone/>
             </a:pPr>
             <a:r>
-              <a:rPr lang="en-US" sz="1250" b="1" dirty="0">
-                <a:solidFill>
-                  <a:srgbClr val="0E1420"/>
+              <a:rPr lang="en-US" sz="1000" dirty="0">
+                <a:solidFill>
+                  <a:srgbClr val="5E6979"/>
                 </a:solidFill>
                 <a:latin typeface="맑은 고딕" pitchFamily="34" charset="0"/>
                 <a:ea typeface="맑은 고딕" pitchFamily="34" charset="-122"/>
@@ -13903,48 +13925,6 @@
               </a:rPr>
               <a:t>Challenge</a:t>
             </a:r>
-            <a:endParaRPr lang="en-US" sz="1250" dirty="0"/>
-          </a:p>
-        </p:txBody>
-      </p:sp>
-      <p:sp>
-        <p:nvSpPr>
-          <p:cNvPr id="27" name="Text 24"/>
-          <p:cNvSpPr txBox="1"/>
-          <p:nvPr/>
-        </p:nvSpPr>
-        <p:spPr>
-          <a:xfrm>
-            <a:off x="3641598" y="4341876"/>
-            <a:ext cx="2105406" cy="217932"/>
-          </a:xfrm>
-          <a:prstGeom prst="rect">
-            <a:avLst/>
-          </a:prstGeom>
-          <a:noFill/>
-          <a:ln/>
-        </p:spPr>
-        <p:txBody>
-          <a:bodyPr wrap="square" lIns="0" tIns="0" rIns="0" bIns="0" rtlCol="0" anchor="t"/>
-          <a:lstStyle/>
-          <a:p>
-            <a:pPr algn="l" indent="0" marL="0">
-              <a:lnSpc>
-                <a:spcPts val="1500"/>
-              </a:lnSpc>
-              <a:buNone/>
-            </a:pPr>
-            <a:r>
-              <a:rPr lang="en-US" sz="1000" dirty="0">
-                <a:solidFill>
-                  <a:srgbClr val="5E6979"/>
-                </a:solidFill>
-                <a:latin typeface="맑은 고딕" pitchFamily="34" charset="0"/>
-                <a:ea typeface="맑은 고딕" pitchFamily="34" charset="-122"/>
-                <a:cs typeface="맑은 고딕" pitchFamily="34" charset="-120"/>
-              </a:rPr>
-              <a:t>도전</a:t>
-            </a:r>
             <a:endParaRPr lang="en-US" sz="1000" dirty="0"/>
           </a:p>
         </p:txBody>
@@ -13957,7 +13937,7 @@
         </p:nvSpPr>
         <p:spPr>
           <a:xfrm>
-            <a:off x="3641598" y="4651248"/>
+            <a:off x="3641598" y="4489029"/>
             <a:ext cx="2105406" cy="408432"/>
           </a:xfrm>
           <a:prstGeom prst="rect">
@@ -13999,12 +13979,12 @@
         </p:nvSpPr>
         <p:spPr>
           <a:xfrm>
-            <a:off x="6167628" y="3794760"/>
-            <a:ext cx="2654046" cy="1629156"/>
+            <a:off x="6167628" y="3606973"/>
+            <a:ext cx="2654046" cy="1477091"/>
           </a:xfrm>
           <a:prstGeom prst="roundRect">
             <a:avLst>
-              <a:gd name="adj" fmla="val 3368"/>
+              <a:gd name="adj" fmla="val 3714"/>
             </a:avLst>
           </a:prstGeom>
           <a:solidFill>
@@ -14026,7 +14006,49 @@
         </p:nvSpPr>
         <p:spPr>
           <a:xfrm>
-            <a:off x="6441948" y="4014216"/>
+            <a:off x="6441948" y="3839297"/>
+            <a:ext cx="2105406" cy="230632"/>
+          </a:xfrm>
+          <a:prstGeom prst="rect">
+            <a:avLst/>
+          </a:prstGeom>
+          <a:noFill/>
+          <a:ln/>
+        </p:spPr>
+        <p:txBody>
+          <a:bodyPr wrap="square" lIns="0" tIns="0" rIns="0" bIns="0" rtlCol="0" anchor="t"/>
+          <a:lstStyle/>
+          <a:p>
+            <a:pPr algn="l" indent="0" marL="0">
+              <a:lnSpc>
+                <a:spcPts val="1600"/>
+              </a:lnSpc>
+              <a:buNone/>
+            </a:pPr>
+            <a:r>
+              <a:rPr lang="en-US" sz="1350" b="1" dirty="0">
+                <a:solidFill>
+                  <a:srgbClr val="0E1420"/>
+                </a:solidFill>
+                <a:latin typeface="맑은 고딕" pitchFamily="34" charset="0"/>
+                <a:ea typeface="맑은 고딕" pitchFamily="34" charset="-122"/>
+                <a:cs typeface="맑은 고딕" pitchFamily="34" charset="-120"/>
+              </a:rPr>
+              <a:t>존중</a:t>
+            </a:r>
+            <a:endParaRPr lang="en-US" sz="1350" dirty="0"/>
+          </a:p>
+        </p:txBody>
+      </p:sp>
+      <p:sp>
+        <p:nvSpPr>
+          <p:cNvPr id="31" name="Text 28"/>
+          <p:cNvSpPr txBox="1"/>
+          <p:nvPr/>
+        </p:nvSpPr>
+        <p:spPr>
+          <a:xfrm>
+            <a:off x="6441948" y="4179657"/>
             <a:ext cx="2105406" cy="217932"/>
           </a:xfrm>
           <a:prstGeom prst="rect">
@@ -14046,7 +14068,49 @@
               <a:buNone/>
             </a:pPr>
             <a:r>
-              <a:rPr lang="en-US" sz="1250" b="1" dirty="0">
+              <a:rPr lang="en-US" sz="1000" dirty="0">
+                <a:solidFill>
+                  <a:srgbClr val="5E6979"/>
+                </a:solidFill>
+                <a:latin typeface="맑은 고딕" pitchFamily="34" charset="0"/>
+                <a:ea typeface="맑은 고딕" pitchFamily="34" charset="-122"/>
+                <a:cs typeface="맑은 고딕" pitchFamily="34" charset="-120"/>
+              </a:rPr>
+              <a:t>Respect</a:t>
+            </a:r>
+            <a:endParaRPr lang="en-US" sz="1000" dirty="0"/>
+          </a:p>
+        </p:txBody>
+      </p:sp>
+      <p:sp>
+        <p:nvSpPr>
+          <p:cNvPr id="32" name="Text 29"/>
+          <p:cNvSpPr txBox="1"/>
+          <p:nvPr/>
+        </p:nvSpPr>
+        <p:spPr>
+          <a:xfrm>
+            <a:off x="6441948" y="4489029"/>
+            <a:ext cx="2105406" cy="408432"/>
+          </a:xfrm>
+          <a:prstGeom prst="rect">
+            <a:avLst/>
+          </a:prstGeom>
+          <a:noFill/>
+          <a:ln/>
+        </p:spPr>
+        <p:txBody>
+          <a:bodyPr wrap="square" lIns="0" tIns="0" rIns="0" bIns="0" rtlCol="0" anchor="t"/>
+          <a:lstStyle/>
+          <a:p>
+            <a:pPr algn="l" indent="0" marL="0">
+              <a:lnSpc>
+                <a:spcPts val="1500"/>
+              </a:lnSpc>
+              <a:buNone/>
+            </a:pPr>
+            <a:r>
+              <a:rPr lang="en-US" sz="1000" dirty="0">
                 <a:solidFill>
                   <a:srgbClr val="0E1420"/>
                 </a:solidFill>
@@ -14054,91 +14118,7 @@
                 <a:ea typeface="맑은 고딕" pitchFamily="34" charset="-122"/>
                 <a:cs typeface="맑은 고딕" pitchFamily="34" charset="-120"/>
               </a:rPr>
-              <a:t>Respect</a:t>
-            </a:r>
-            <a:endParaRPr lang="en-US" sz="1250" dirty="0"/>
-          </a:p>
-        </p:txBody>
-      </p:sp>
-      <p:sp>
-        <p:nvSpPr>
-          <p:cNvPr id="31" name="Text 28"/>
-          <p:cNvSpPr txBox="1"/>
-          <p:nvPr/>
-        </p:nvSpPr>
-        <p:spPr>
-          <a:xfrm>
-            <a:off x="6441948" y="4341876"/>
-            <a:ext cx="2105406" cy="217932"/>
-          </a:xfrm>
-          <a:prstGeom prst="rect">
-            <a:avLst/>
-          </a:prstGeom>
-          <a:noFill/>
-          <a:ln/>
-        </p:spPr>
-        <p:txBody>
-          <a:bodyPr wrap="square" lIns="0" tIns="0" rIns="0" bIns="0" rtlCol="0" anchor="t"/>
-          <a:lstStyle/>
-          <a:p>
-            <a:pPr algn="l" indent="0" marL="0">
-              <a:lnSpc>
-                <a:spcPts val="1500"/>
-              </a:lnSpc>
-              <a:buNone/>
-            </a:pPr>
-            <a:r>
-              <a:rPr lang="en-US" sz="1000" dirty="0">
-                <a:solidFill>
-                  <a:srgbClr val="5E6979"/>
-                </a:solidFill>
-                <a:latin typeface="맑은 고딕" pitchFamily="34" charset="0"/>
-                <a:ea typeface="맑은 고딕" pitchFamily="34" charset="-122"/>
-                <a:cs typeface="맑은 고딕" pitchFamily="34" charset="-120"/>
-              </a:rPr>
-              <a:t>존중</a:t>
-            </a:r>
-            <a:endParaRPr lang="en-US" sz="1000" dirty="0"/>
-          </a:p>
-        </p:txBody>
-      </p:sp>
-      <p:sp>
-        <p:nvSpPr>
-          <p:cNvPr id="32" name="Text 29"/>
-          <p:cNvSpPr txBox="1"/>
-          <p:nvPr/>
-        </p:nvSpPr>
-        <p:spPr>
-          <a:xfrm>
-            <a:off x="6441948" y="4651248"/>
-            <a:ext cx="2105406" cy="598932"/>
-          </a:xfrm>
-          <a:prstGeom prst="rect">
-            <a:avLst/>
-          </a:prstGeom>
-          <a:noFill/>
-          <a:ln/>
-        </p:spPr>
-        <p:txBody>
-          <a:bodyPr wrap="square" lIns="0" tIns="0" rIns="0" bIns="0" rtlCol="0" anchor="t"/>
-          <a:lstStyle/>
-          <a:p>
-            <a:pPr algn="l" indent="0" marL="0">
-              <a:lnSpc>
-                <a:spcPts val="1500"/>
-              </a:lnSpc>
-              <a:buNone/>
-            </a:pPr>
-            <a:r>
-              <a:rPr lang="en-US" sz="1000" dirty="0">
-                <a:solidFill>
-                  <a:srgbClr val="0E1420"/>
-                </a:solidFill>
-                <a:latin typeface="맑은 고딕" pitchFamily="34" charset="0"/>
-                <a:ea typeface="맑은 고딕" pitchFamily="34" charset="-122"/>
-                <a:cs typeface="맑은 고딕" pitchFamily="34" charset="-120"/>
-              </a:rPr>
-              <a:t>사람을 추적하지 않고 공간을 측정합니다. 동의 없이 개인을 연결하지 않습니다.</a:t>
+              <a:t>사람을 추적하지 않고 공간을 측정합니다. 개인 연결은 동의 시에만.</a:t>
             </a:r>
             <a:endParaRPr lang="en-US" sz="1000" dirty="0"/>
           </a:p>
@@ -14152,12 +14132,12 @@
         </p:nvSpPr>
         <p:spPr>
           <a:xfrm>
-            <a:off x="8967978" y="3794760"/>
-            <a:ext cx="2654046" cy="1629156"/>
+            <a:off x="8967978" y="3606973"/>
+            <a:ext cx="2654046" cy="1477091"/>
           </a:xfrm>
           <a:prstGeom prst="roundRect">
             <a:avLst>
-              <a:gd name="adj" fmla="val 3368"/>
+              <a:gd name="adj" fmla="val 3714"/>
             </a:avLst>
           </a:prstGeom>
           <a:solidFill>
@@ -14179,7 +14159,49 @@
         </p:nvSpPr>
         <p:spPr>
           <a:xfrm>
-            <a:off x="9242298" y="4014216"/>
+            <a:off x="9242298" y="3839297"/>
+            <a:ext cx="2105406" cy="230632"/>
+          </a:xfrm>
+          <a:prstGeom prst="rect">
+            <a:avLst/>
+          </a:prstGeom>
+          <a:noFill/>
+          <a:ln/>
+        </p:spPr>
+        <p:txBody>
+          <a:bodyPr wrap="square" lIns="0" tIns="0" rIns="0" bIns="0" rtlCol="0" anchor="t"/>
+          <a:lstStyle/>
+          <a:p>
+            <a:pPr algn="l" indent="0" marL="0">
+              <a:lnSpc>
+                <a:spcPts val="1600"/>
+              </a:lnSpc>
+              <a:buNone/>
+            </a:pPr>
+            <a:r>
+              <a:rPr lang="en-US" sz="1350" b="1" dirty="0">
+                <a:solidFill>
+                  <a:srgbClr val="0E1420"/>
+                </a:solidFill>
+                <a:latin typeface="맑은 고딕" pitchFamily="34" charset="0"/>
+                <a:ea typeface="맑은 고딕" pitchFamily="34" charset="-122"/>
+                <a:cs typeface="맑은 고딕" pitchFamily="34" charset="-120"/>
+              </a:rPr>
+              <a:t>독창성</a:t>
+            </a:r>
+            <a:endParaRPr lang="en-US" sz="1350" dirty="0"/>
+          </a:p>
+        </p:txBody>
+      </p:sp>
+      <p:sp>
+        <p:nvSpPr>
+          <p:cNvPr id="35" name="Text 32"/>
+          <p:cNvSpPr txBox="1"/>
+          <p:nvPr/>
+        </p:nvSpPr>
+        <p:spPr>
+          <a:xfrm>
+            <a:off x="9242298" y="4179657"/>
             <a:ext cx="2105406" cy="217932"/>
           </a:xfrm>
           <a:prstGeom prst="rect">
@@ -14199,9 +14221,9 @@
               <a:buNone/>
             </a:pPr>
             <a:r>
-              <a:rPr lang="en-US" sz="1250" b="1" dirty="0">
-                <a:solidFill>
-                  <a:srgbClr val="0E1420"/>
+              <a:rPr lang="en-US" sz="1000" dirty="0">
+                <a:solidFill>
+                  <a:srgbClr val="5E6979"/>
                 </a:solidFill>
                 <a:latin typeface="맑은 고딕" pitchFamily="34" charset="0"/>
                 <a:ea typeface="맑은 고딕" pitchFamily="34" charset="-122"/>
@@ -14209,48 +14231,6 @@
               </a:rPr>
               <a:t>Originality</a:t>
             </a:r>
-            <a:endParaRPr lang="en-US" sz="1250" dirty="0"/>
-          </a:p>
-        </p:txBody>
-      </p:sp>
-      <p:sp>
-        <p:nvSpPr>
-          <p:cNvPr id="35" name="Text 32"/>
-          <p:cNvSpPr txBox="1"/>
-          <p:nvPr/>
-        </p:nvSpPr>
-        <p:spPr>
-          <a:xfrm>
-            <a:off x="9242298" y="4341876"/>
-            <a:ext cx="2105406" cy="217932"/>
-          </a:xfrm>
-          <a:prstGeom prst="rect">
-            <a:avLst/>
-          </a:prstGeom>
-          <a:noFill/>
-          <a:ln/>
-        </p:spPr>
-        <p:txBody>
-          <a:bodyPr wrap="square" lIns="0" tIns="0" rIns="0" bIns="0" rtlCol="0" anchor="t"/>
-          <a:lstStyle/>
-          <a:p>
-            <a:pPr algn="l" indent="0" marL="0">
-              <a:lnSpc>
-                <a:spcPts val="1500"/>
-              </a:lnSpc>
-              <a:buNone/>
-            </a:pPr>
-            <a:r>
-              <a:rPr lang="en-US" sz="1000" dirty="0">
-                <a:solidFill>
-                  <a:srgbClr val="5E6979"/>
-                </a:solidFill>
-                <a:latin typeface="맑은 고딕" pitchFamily="34" charset="0"/>
-                <a:ea typeface="맑은 고딕" pitchFamily="34" charset="-122"/>
-                <a:cs typeface="맑은 고딕" pitchFamily="34" charset="-120"/>
-              </a:rPr>
-              <a:t>독창성</a:t>
-            </a:r>
             <a:endParaRPr lang="en-US" sz="1000" dirty="0"/>
           </a:p>
         </p:txBody>
@@ -14263,7 +14243,7 @@
         </p:nvSpPr>
         <p:spPr>
           <a:xfrm>
-            <a:off x="9242298" y="4651248"/>
+            <a:off x="9242298" y="4489029"/>
             <a:ext cx="2105406" cy="408432"/>
           </a:xfrm>
           <a:prstGeom prst="rect">
@@ -14618,7 +14598,7 @@
         </p:nvSpPr>
         <p:spPr>
           <a:xfrm>
-            <a:off x="841248" y="1700784"/>
+            <a:off x="841248" y="1965441"/>
             <a:ext cx="3038856" cy="243332"/>
           </a:xfrm>
           <a:prstGeom prst="rect">
@@ -14660,7 +14640,7 @@
         </p:nvSpPr>
         <p:spPr>
           <a:xfrm>
-            <a:off x="841248" y="2017268"/>
+            <a:off x="841248" y="2281925"/>
             <a:ext cx="3038856" cy="306832"/>
           </a:xfrm>
           <a:prstGeom prst="rect">
@@ -14702,7 +14682,7 @@
         </p:nvSpPr>
         <p:spPr>
           <a:xfrm>
-            <a:off x="841248" y="2433828"/>
+            <a:off x="841248" y="2698485"/>
             <a:ext cx="3038856" cy="1043432"/>
           </a:xfrm>
           <a:prstGeom prst="rect">
@@ -14798,7 +14778,7 @@
         </p:nvSpPr>
         <p:spPr>
           <a:xfrm>
-            <a:off x="4575048" y="1700784"/>
+            <a:off x="4575048" y="1965441"/>
             <a:ext cx="3038856" cy="243332"/>
           </a:xfrm>
           <a:prstGeom prst="rect">
@@ -14840,7 +14820,7 @@
         </p:nvSpPr>
         <p:spPr>
           <a:xfrm>
-            <a:off x="4575048" y="2017268"/>
+            <a:off x="4575048" y="2281925"/>
             <a:ext cx="3038856" cy="306832"/>
           </a:xfrm>
           <a:prstGeom prst="rect">
@@ -14882,7 +14862,7 @@
         </p:nvSpPr>
         <p:spPr>
           <a:xfrm>
-            <a:off x="4575048" y="2433828"/>
+            <a:off x="4575048" y="2698485"/>
             <a:ext cx="3038856" cy="535432"/>
           </a:xfrm>
           <a:prstGeom prst="rect">
@@ -14958,7 +14938,7 @@
         </p:nvSpPr>
         <p:spPr>
           <a:xfrm>
-            <a:off x="8308848" y="1700784"/>
+            <a:off x="8308848" y="1965441"/>
             <a:ext cx="3038856" cy="243332"/>
           </a:xfrm>
           <a:prstGeom prst="rect">
@@ -15000,7 +14980,7 @@
         </p:nvSpPr>
         <p:spPr>
           <a:xfrm>
-            <a:off x="8308848" y="2017268"/>
+            <a:off x="8308848" y="2281925"/>
             <a:ext cx="3038856" cy="306832"/>
           </a:xfrm>
           <a:prstGeom prst="rect">
@@ -15042,7 +15022,7 @@
         </p:nvSpPr>
         <p:spPr>
           <a:xfrm>
-            <a:off x="8308848" y="2433828"/>
+            <a:off x="8308848" y="2698485"/>
             <a:ext cx="3038856" cy="535432"/>
           </a:xfrm>
           <a:prstGeom prst="rect">
@@ -18649,7 +18629,7 @@
         </p:nvSpPr>
         <p:spPr>
           <a:xfrm>
-            <a:off x="841248" y="1700784"/>
+            <a:off x="841248" y="2222246"/>
             <a:ext cx="3038856" cy="306832"/>
           </a:xfrm>
           <a:prstGeom prst="rect">
@@ -18691,7 +18671,7 @@
         </p:nvSpPr>
         <p:spPr>
           <a:xfrm>
-            <a:off x="841248" y="2117344"/>
+            <a:off x="841248" y="2638806"/>
             <a:ext cx="3038856" cy="1221232"/>
           </a:xfrm>
           <a:prstGeom prst="rect">
@@ -18861,7 +18841,7 @@
         </p:nvSpPr>
         <p:spPr>
           <a:xfrm>
-            <a:off x="4575048" y="1700784"/>
+            <a:off x="4575048" y="2222246"/>
             <a:ext cx="3038856" cy="306832"/>
           </a:xfrm>
           <a:prstGeom prst="rect">
@@ -18903,7 +18883,7 @@
         </p:nvSpPr>
         <p:spPr>
           <a:xfrm>
-            <a:off x="4575048" y="2117344"/>
+            <a:off x="4575048" y="2638806"/>
             <a:ext cx="3038856" cy="967232"/>
           </a:xfrm>
           <a:prstGeom prst="rect">
@@ -19073,7 +19053,7 @@
         </p:nvSpPr>
         <p:spPr>
           <a:xfrm>
-            <a:off x="8308848" y="1700784"/>
+            <a:off x="8308848" y="2222246"/>
             <a:ext cx="3038856" cy="306832"/>
           </a:xfrm>
           <a:prstGeom prst="rect">
@@ -19115,7 +19095,7 @@
         </p:nvSpPr>
         <p:spPr>
           <a:xfrm>
-            <a:off x="8308848" y="2117344"/>
+            <a:off x="8308848" y="2638806"/>
             <a:ext cx="3038856" cy="1221232"/>
           </a:xfrm>
           <a:prstGeom prst="rect">
